--- a/Planning docs/Slides/lesson-13-1-teacher-slides.pptx
+++ b/Planning docs/Slides/lesson-13-1-teacher-slides.pptx
@@ -4888,7 +4888,7 @@
                 <a:ea typeface="Calibri" pitchFamily="34" charset="-122"/>
                 <a:cs typeface="Calibri" pitchFamily="34" charset="-120"/>
               </a:rPr>
-              <a:t>•  What has each character learned by this point?</a:t>
+              <a:t>•  The princess comes out of the dungeon. How does the author describe this moment? What details matter most?</a:t>
             </a:r>
             <a:endParaRPr lang="en-US" sz="1500" dirty="0"/>
           </a:p>
@@ -4905,24 +4905,7 @@
                 <a:ea typeface="Calibri" pitchFamily="34" charset="-122"/>
                 <a:cs typeface="Calibri" pitchFamily="34" charset="-120"/>
               </a:rPr>
-              <a:t>•  What does "light" represent beyond the physical kind?</a:t>
-            </a:r>
-            <a:endParaRPr lang="en-US" sz="1500" dirty="0"/>
-          </a:p>
-          <a:p>
-            <a:pPr indent="0" marL="0">
-              <a:buNone/>
-            </a:pPr>
-            <a:r>
-              <a:rPr lang="en-US" sz="1500" dirty="0">
-                <a:solidFill>
-                  <a:srgbClr val="1E293B"/>
-                </a:solidFill>
-                <a:latin typeface="Calibri" pitchFamily="34" charset="0"/>
-                <a:ea typeface="Calibri" pitchFamily="34" charset="-122"/>
-                <a:cs typeface="Calibri" pitchFamily="34" charset="-120"/>
-              </a:rPr>
-              <a:t>•  What lesson do you think the author most wants readers to take away?</a:t>
+              <a:t>•  Look at the world at the start of Chapter 40. What is different from the beginning of the story? What has stayed the same?</a:t>
             </a:r>
             <a:endParaRPr lang="en-US" sz="1500" dirty="0"/>
           </a:p>
